--- a/classes/parte-0-fundamentos-y-prerrequisitos/020-sistemas-de-numeracion-y-encoding-binario-hex-base64-y-url/clase-020-presentacion.pptx
+++ b/classes/parte-0-fundamentos-y-prerrequisitos/020-sistemas-de-numeracion-y-encoding-binario-hex-base64-y-url/clase-020-presentacion.pptx
@@ -17,6 +17,10 @@
     <p:sldId id="265" r:id="rId16"/>
     <p:sldId id="266" r:id="rId17"/>
     <p:sldId id="267" r:id="rId18"/>
+    <p:sldId id="268" r:id="rId19"/>
+    <p:sldId id="269" r:id="rId20"/>
+    <p:sldId id="270" r:id="rId21"/>
+    <p:sldId id="271" r:id="rId22"/>
   </p:sldIdLst>
   <p:sldSz cx="9144000" cy="6858000" type="screen4x3"/>
   <p:notesSz cx="6858000" cy="9144000"/>
@@ -3198,7 +3202,7 @@
                   <a:srgbClr val="0B3D2E"/>
                 </a:solidFill>
               </a:rPr>
-              <a:t>⚠️ Errores comunes</a:t>
+              <a:t>✍️ Ejercicios</a:t>
             </a:r>
           </a:p>
         </p:txBody>
@@ -3236,67 +3240,82 @@
                   <a:srgbClr val="22282E"/>
                 </a:solidFill>
               </a:rPr>
-              <a:t>•  Llamar "cifrado" a Base64 — Base64 es codificación reversible sin clave, no ofrece confidencialidad. Corrige el concepto.</a:t>
-            </a:r>
-          </a:p>
-          <a:p>
-            <a:pPr>
-              <a:spcAft>
-                <a:spcPts val="600"/>
-              </a:spcAft>
-            </a:pPr>
-            <a:r>
-              <a:rPr sz="1500">
-                <a:solidFill>
-                  <a:srgbClr val="22282E"/>
-                </a:solidFill>
-              </a:rPr>
-              <a:t>•  Base64 no decodifica (padding) — Faltan = de relleno. Ajusta el padding o usa variantes URL-safe.</a:t>
-            </a:r>
-          </a:p>
-          <a:p>
-            <a:pPr>
-              <a:spcAft>
-                <a:spcPts val="600"/>
-              </a:spcAft>
-            </a:pPr>
-            <a:r>
-              <a:rPr sz="1500">
-                <a:solidFill>
-                  <a:srgbClr val="22282E"/>
-                </a:solidFill>
-              </a:rPr>
-              <a:t>•  Caracteres raros al decodificar — Confundes bytes con texto. Trabaja en bytes y decodifica con la codificación correcta.</a:t>
-            </a:r>
-          </a:p>
-          <a:p>
-            <a:pPr>
-              <a:spcAft>
-                <a:spcPts val="600"/>
-              </a:spcAft>
-            </a:pPr>
-            <a:r>
-              <a:rPr sz="1500">
-                <a:solidFill>
-                  <a:srgbClr val="22282E"/>
-                </a:solidFill>
-              </a:rPr>
-              <a:t>•  Intentar "revertir" un hash — Los hashes no se revierten; a lo sumo se comparan o se craquean por diccionario.</a:t>
-            </a:r>
-          </a:p>
-          <a:p>
-            <a:pPr>
-              <a:spcAft>
-                <a:spcPts val="600"/>
-              </a:spcAft>
-            </a:pPr>
-            <a:r>
-              <a:rPr sz="1500">
-                <a:solidFill>
-                  <a:srgbClr val="22282E"/>
-                </a:solidFill>
-              </a:rPr>
-              <a:t>•  URL encode/decode inconsistente — + vs %20 según contexto (form vs. path). Usa la función adecuada.</a:t>
+              <a:t>•  Convierte a mano 192 y 168 a binario y a hexadecimal; verifica el resultado con Python.</a:t>
+            </a:r>
+          </a:p>
+          <a:p>
+            <a:pPr>
+              <a:spcAft>
+                <a:spcPts val="600"/>
+              </a:spcAft>
+            </a:pPr>
+            <a:r>
+              <a:rPr sz="1500">
+                <a:solidFill>
+                  <a:srgbClr val="22282E"/>
+                </a:solidFill>
+              </a:rPr>
+              <a:t>•  Decodifica una cabecera HTTP Authorization: Basic ... (Base64) y explica por qué transmitirla sin TLS es un riesgo.</a:t>
+            </a:r>
+          </a:p>
+          <a:p>
+            <a:pPr>
+              <a:spcAft>
+                <a:spcPts val="600"/>
+              </a:spcAft>
+            </a:pPr>
+            <a:r>
+              <a:rPr sz="1500">
+                <a:solidFill>
+                  <a:srgbClr val="22282E"/>
+                </a:solidFill>
+              </a:rPr>
+              <a:t>•  Determina si 5f4dcc3b5aa765d61d8327deb882cf99 es un hash o una codificación, y de qué tipo, razonando por su longitud y su alfabeto.</a:t>
+            </a:r>
+          </a:p>
+          <a:p>
+            <a:pPr>
+              <a:spcAft>
+                <a:spcPts val="600"/>
+              </a:spcAft>
+            </a:pPr>
+            <a:r>
+              <a:rPr sz="1500">
+                <a:solidFill>
+                  <a:srgbClr val="22282E"/>
+                </a:solidFill>
+              </a:rPr>
+              <a:t>•  Toma un payload XSS y aplícale por separado URL encoding y HTML entity encoding; explica para qué sirve cada uno en un ataque y en una defensa.</a:t>
+            </a:r>
+          </a:p>
+          <a:p>
+            <a:pPr>
+              <a:spcAft>
+                <a:spcPts val="600"/>
+              </a:spcAft>
+            </a:pPr>
+            <a:r>
+              <a:rPr sz="1500">
+                <a:solidFill>
+                  <a:srgbClr val="22282E"/>
+                </a:solidFill>
+              </a:rPr>
+              <a:t>•  Escribe una función que detecte heurísticamente si una cadena parece Base64, hex o URL-encoded, y justifica cada regla de detección.</a:t>
+            </a:r>
+          </a:p>
+          <a:p>
+            <a:pPr>
+              <a:spcAft>
+                <a:spcPts val="600"/>
+              </a:spcAft>
+            </a:pPr>
+            <a:r>
+              <a:rPr sz="1500">
+                <a:solidFill>
+                  <a:srgbClr val="22282E"/>
+                </a:solidFill>
+              </a:rPr>
+              <a:t>•  Decodifica una cadena con doble Base64 y documenta cada capa que vas revelando.</a:t>
             </a:r>
           </a:p>
         </p:txBody>
@@ -3347,7 +3366,7 @@
                   <a:srgbClr val="0B3D2E"/>
                 </a:solidFill>
               </a:rPr>
-              <a:t>❓ Preguntas frecuentes</a:t>
+              <a:t>📝 Reto verificable</a:t>
             </a:r>
           </a:p>
         </p:txBody>
@@ -3385,52 +3404,22 @@
                   <a:srgbClr val="22282E"/>
                 </a:solidFill>
               </a:rPr>
-              <a:t>•  ❓ ¿Base64 aporta algo de seguridad? No en confidencialidad: cualquiera lo decodifica. Solo sirve para transportar binario por canales de texto. Nunca lo uses para "proteger" datos.</a:t>
-            </a:r>
-          </a:p>
-          <a:p>
-            <a:pPr>
-              <a:spcAft>
-                <a:spcPts val="600"/>
-              </a:spcAft>
-            </a:pPr>
-            <a:r>
-              <a:rPr sz="1500">
-                <a:solidFill>
-                  <a:srgbClr val="22282E"/>
-                </a:solidFill>
-              </a:rPr>
-              <a:t>•  ❓ ¿Por qué los atacantes codifican payloads? Para evadir filtros, WAFs o detección por firma. Ver una cadena Base64/hex/URL en un log suele merecer decodificarla y analizarla.</a:t>
-            </a:r>
-          </a:p>
-          <a:p>
-            <a:pPr>
-              <a:spcAft>
-                <a:spcPts val="600"/>
-              </a:spcAft>
-            </a:pPr>
-            <a:r>
-              <a:rPr sz="1500">
-                <a:solidFill>
-                  <a:srgbClr val="22282E"/>
-                </a:solidFill>
-              </a:rPr>
-              <a:t>•  ❓ ¿Hashing es lo mismo que cifrado? No. El cifrado es reversible con clave (confidencialidad); el hash es unidireccional (integridad). Lo vemos a fondo en la Clase 021.</a:t>
-            </a:r>
-          </a:p>
-          <a:p>
-            <a:pPr>
-              <a:spcAft>
-                <a:spcPts val="600"/>
-              </a:spcAft>
-            </a:pPr>
-            <a:r>
-              <a:rPr sz="1500">
-                <a:solidFill>
-                  <a:srgbClr val="22282E"/>
-                </a:solidFill>
-              </a:rPr>
-              <a:t>•  ❓ ¿Qué es CyberChef? Una "navaja suiza" web para encadenar operaciones de codificación, cifrado y análisis. Ideal para desofuscar payloads paso a paso.</a:t>
+              <a:t>•  Escribe decoder.py, una utilidad que reciba una cadena e intente detectar y decodificar automáticamente su capa externa (Base64, hex o percent encoding), aplicándolo de forma recursiva hasta obtener…</a:t>
+            </a:r>
+          </a:p>
+          <a:p>
+            <a:pPr>
+              <a:spcAft>
+                <a:spcPts val="600"/>
+              </a:spcAft>
+            </a:pPr>
+            <a:r>
+              <a:rPr sz="1500">
+                <a:solidFill>
+                  <a:srgbClr val="22282E"/>
+                </a:solidFill>
+              </a:rPr>
+              <a:t>•  Criterio de aceptación: sobre una cadena con dos capas (por ejemplo el URL-encode de un Base64), la herramienta revela el texto original indicando ambas capas en orden; ante un SHA-256 responde que…</a:t>
             </a:r>
           </a:p>
         </p:txBody>
@@ -3481,7 +3470,7 @@
                   <a:srgbClr val="0B3D2E"/>
                 </a:solidFill>
               </a:rPr>
-              <a:t>🔗 Referencias</a:t>
+              <a:t>⚠️ Errores comunes</a:t>
             </a:r>
           </a:p>
         </p:txBody>
@@ -3519,56 +3508,519 @@
                   <a:srgbClr val="22282E"/>
                 </a:solidFill>
               </a:rPr>
-              <a:t>•  RFC 4648, Base16/Base32/Base64 Encodings — &lt;https://www.rfc-editor.org/rfc/rfc4648&gt;</a:t>
-            </a:r>
-          </a:p>
-          <a:p>
-            <a:pPr>
-              <a:spcAft>
-                <a:spcPts val="600"/>
-              </a:spcAft>
-            </a:pPr>
-            <a:r>
-              <a:rPr sz="1500">
-                <a:solidFill>
-                  <a:srgbClr val="22282E"/>
-                </a:solidFill>
-              </a:rPr>
-              <a:t>•  RFC 3986, URI Generic Syntax — &lt;https://www.rfc-editor.org/rfc/rfc3986&gt;</a:t>
-            </a:r>
-          </a:p>
-          <a:p>
-            <a:pPr>
-              <a:spcAft>
-                <a:spcPts val="600"/>
-              </a:spcAft>
-            </a:pPr>
-            <a:r>
-              <a:rPr sz="1500">
-                <a:solidFill>
-                  <a:srgbClr val="22282E"/>
-                </a:solidFill>
-              </a:rPr>
-              <a:t>•  CyberChef — &lt;https://gchq.github.io/CyberChef/&gt;</a:t>
-            </a:r>
-          </a:p>
-          <a:p>
-            <a:pPr>
-              <a:spcAft>
-                <a:spcPts val="600"/>
-              </a:spcAft>
-            </a:pPr>
-            <a:r>
-              <a:rPr sz="1500">
-                <a:solidFill>
-                  <a:srgbClr val="22282E"/>
-                </a:solidFill>
-              </a:rPr>
-              <a:t>•  Unicode / UTF-8 (The Unicode Standard) — &lt;https://home.unicode.org/&gt;</a:t>
-            </a:r>
-          </a:p>
-        </p:txBody>
-      </p:sp>
+              <a:t>•  Llamar "cifrado" a Base64 — Base64 es codificación reversible sin clave; no da confidencialidad. Corrige el concepto.</a:t>
+            </a:r>
+          </a:p>
+          <a:p>
+            <a:pPr>
+              <a:spcAft>
+                <a:spcPts val="600"/>
+              </a:spcAft>
+            </a:pPr>
+            <a:r>
+              <a:rPr sz="1500">
+                <a:solidFill>
+                  <a:srgbClr val="22282E"/>
+                </a:solidFill>
+              </a:rPr>
+              <a:t>•  Base64 no decodifica (padding) — Faltan los = de relleno. Ajusta el padding o usa la variante URL-safe.</a:t>
+            </a:r>
+          </a:p>
+          <a:p>
+            <a:pPr>
+              <a:spcAft>
+                <a:spcPts val="600"/>
+              </a:spcAft>
+            </a:pPr>
+            <a:r>
+              <a:rPr sz="1500">
+                <a:solidFill>
+                  <a:srgbClr val="22282E"/>
+                </a:solidFill>
+              </a:rPr>
+              <a:t>•  Caracteres raros al decodificar — Confundes bytes con texto. Trabaja en bytes y decodifica con la codificación de caracteres correcta.</a:t>
+            </a:r>
+          </a:p>
+          <a:p>
+            <a:pPr>
+              <a:spcAft>
+                <a:spcPts val="600"/>
+              </a:spcAft>
+            </a:pPr>
+            <a:r>
+              <a:rPr sz="1500">
+                <a:solidFill>
+                  <a:srgbClr val="22282E"/>
+                </a:solidFill>
+              </a:rPr>
+              <a:t>•  Intentar "revertir" un hash — Los hashes no se revierten; a lo sumo se comparan o se atacan por diccionario/fuerza bruta.</a:t>
+            </a:r>
+          </a:p>
+          <a:p>
+            <a:pPr>
+              <a:spcAft>
+                <a:spcPts val="600"/>
+              </a:spcAft>
+            </a:pPr>
+            <a:r>
+              <a:rPr sz="1500">
+                <a:solidFill>
+                  <a:srgbClr val="22282E"/>
+                </a:solidFill>
+              </a:rPr>
+              <a:t>•  URL encode/decode inconsistente — + frente a %20 según el contexto (form-urlencoded vs. path). Usa la función adecuada a cada caso.</a:t>
+            </a:r>
+          </a:p>
+          <a:p>
+            <a:pPr>
+              <a:spcAft>
+                <a:spcPts val="600"/>
+              </a:spcAft>
+            </a:pPr>
+            <a:r>
+              <a:rPr sz="1500">
+                <a:solidFill>
+                  <a:srgbClr val="22282E"/>
+                </a:solidFill>
+              </a:rPr>
+              <a:t>•  Detección de tipo equivocada — Una cadena hex también es Base64 válida. Aplica reglas por longitud, alfabeto y padding en orden.</a:t>
+            </a:r>
+          </a:p>
+        </p:txBody>
+      </p:sp>
+    </p:spTree>
+  </p:cSld>
+  <p:clrMapOvr>
+    <a:masterClrMapping/>
+  </p:clrMapOvr>
+</p:sld>
+</file>
+
+<file path=ppt/slides/slide13.xml><?xml version="1.0" encoding="utf-8"?>
+<p:sld xmlns:a="http://schemas.openxmlformats.org/drawingml/2006/main" xmlns:p="http://schemas.openxmlformats.org/presentationml/2006/main" xmlns:r="http://schemas.openxmlformats.org/officeDocument/2006/relationships">
+  <p:cSld>
+    <p:spTree>
+      <p:nvGrpSpPr>
+        <p:cNvPr id="1" name=""/>
+        <p:cNvGrpSpPr/>
+        <p:nvPr/>
+      </p:nvGrpSpPr>
+      <p:grpSpPr/>
+      <p:sp>
+        <p:nvSpPr>
+          <p:cNvPr id="2" name="TextBox 1"/>
+          <p:cNvSpPr txBox="1"/>
+          <p:nvPr/>
+        </p:nvSpPr>
+        <p:spPr>
+          <a:xfrm>
+            <a:off x="457200" y="320040"/>
+            <a:ext cx="8229600" cy="822960"/>
+          </a:xfrm>
+          <a:prstGeom prst="rect">
+            <a:avLst/>
+          </a:prstGeom>
+          <a:noFill/>
+        </p:spPr>
+        <p:txBody>
+          <a:bodyPr wrap="square">
+            <a:spAutoFit/>
+          </a:bodyPr>
+          <a:lstStyle/>
+          <a:p>
+            <a:r>
+              <a:rPr sz="2600" b="1">
+                <a:solidFill>
+                  <a:srgbClr val="0B3D2E"/>
+                </a:solidFill>
+              </a:rPr>
+              <a:t>❓ Preguntas frecuentes</a:t>
+            </a:r>
+          </a:p>
+        </p:txBody>
+      </p:sp>
+      <p:sp>
+        <p:nvSpPr>
+          <p:cNvPr id="3" name="TextBox 2"/>
+          <p:cNvSpPr txBox="1"/>
+          <p:nvPr/>
+        </p:nvSpPr>
+        <p:spPr>
+          <a:xfrm>
+            <a:off x="457200" y="1280160"/>
+            <a:ext cx="8229600" cy="4937760"/>
+          </a:xfrm>
+          <a:prstGeom prst="rect">
+            <a:avLst/>
+          </a:prstGeom>
+          <a:noFill/>
+        </p:spPr>
+        <p:txBody>
+          <a:bodyPr wrap="square">
+            <a:spAutoFit/>
+          </a:bodyPr>
+          <a:lstStyle/>
+          <a:p>
+            <a:pPr>
+              <a:spcAft>
+                <a:spcPts val="600"/>
+              </a:spcAft>
+            </a:pPr>
+            <a:r>
+              <a:rPr sz="1500">
+                <a:solidFill>
+                  <a:srgbClr val="22282E"/>
+                </a:solidFill>
+              </a:rPr>
+              <a:t>•  ❓ ¿Base64 aporta algo de seguridad? No en términos de confidencialidad: cualquiera lo decodifica sin clave. Solo sirve para transportar binario por canales de texto. Nunca lo uses para "proteger"…</a:t>
+            </a:r>
+          </a:p>
+          <a:p>
+            <a:pPr>
+              <a:spcAft>
+                <a:spcPts val="600"/>
+              </a:spcAft>
+            </a:pPr>
+            <a:r>
+              <a:rPr sz="1500">
+                <a:solidFill>
+                  <a:srgbClr val="22282E"/>
+                </a:solidFill>
+              </a:rPr>
+              <a:t>•  ❓ ¿Por qué los atacantes codifican los payloads? Para evadir filtros, WAFs o detección por firma. Encontrar una cadena Base64, hex o URL-encoded en un log suele merecer decodificarla y analizar qué…</a:t>
+            </a:r>
+          </a:p>
+          <a:p>
+            <a:pPr>
+              <a:spcAft>
+                <a:spcPts val="600"/>
+              </a:spcAft>
+            </a:pPr>
+            <a:r>
+              <a:rPr sz="1500">
+                <a:solidFill>
+                  <a:srgbClr val="22282E"/>
+                </a:solidFill>
+              </a:rPr>
+              <a:t>•  ❓ ¿Hashing es lo mismo que cifrado? No. El cifrado es reversible con clave y busca confidencialidad; el hash es unidireccional y busca integridad. Lo vemos a fondo en la Clase 021.</a:t>
+            </a:r>
+          </a:p>
+          <a:p>
+            <a:pPr>
+              <a:spcAft>
+                <a:spcPts val="600"/>
+              </a:spcAft>
+            </a:pPr>
+            <a:r>
+              <a:rPr sz="1500">
+                <a:solidFill>
+                  <a:srgbClr val="22282E"/>
+                </a:solidFill>
+              </a:rPr>
+              <a:t>•  ❓ ¿Qué es CyberChef? Una "navaja suiza" web para encadenar operaciones de codificación, cifrado y análisis en "recetas". Es ideal para desofuscar payloads en capas paso a paso y verificar tus propias…</a:t>
+            </a:r>
+          </a:p>
+        </p:txBody>
+      </p:sp>
+    </p:spTree>
+  </p:cSld>
+  <p:clrMapOvr>
+    <a:masterClrMapping/>
+  </p:clrMapOvr>
+</p:sld>
+</file>
+
+<file path=ppt/slides/slide14.xml><?xml version="1.0" encoding="utf-8"?>
+<p:sld xmlns:a="http://schemas.openxmlformats.org/drawingml/2006/main" xmlns:p="http://schemas.openxmlformats.org/presentationml/2006/main" xmlns:r="http://schemas.openxmlformats.org/officeDocument/2006/relationships">
+  <p:cSld>
+    <p:spTree>
+      <p:nvGrpSpPr>
+        <p:cNvPr id="1" name=""/>
+        <p:cNvGrpSpPr/>
+        <p:nvPr/>
+      </p:nvGrpSpPr>
+      <p:grpSpPr/>
+      <p:sp>
+        <p:nvSpPr>
+          <p:cNvPr id="2" name="TextBox 1"/>
+          <p:cNvSpPr txBox="1"/>
+          <p:nvPr/>
+        </p:nvSpPr>
+        <p:spPr>
+          <a:xfrm>
+            <a:off x="457200" y="320040"/>
+            <a:ext cx="8229600" cy="822960"/>
+          </a:xfrm>
+          <a:prstGeom prst="rect">
+            <a:avLst/>
+          </a:prstGeom>
+          <a:noFill/>
+        </p:spPr>
+        <p:txBody>
+          <a:bodyPr wrap="square">
+            <a:spAutoFit/>
+          </a:bodyPr>
+          <a:lstStyle/>
+          <a:p>
+            <a:r>
+              <a:rPr sz="2600" b="1">
+                <a:solidFill>
+                  <a:srgbClr val="0B3D2E"/>
+                </a:solidFill>
+              </a:rPr>
+              <a:t>🔗 Referencias</a:t>
+            </a:r>
+          </a:p>
+        </p:txBody>
+      </p:sp>
+      <p:sp>
+        <p:nvSpPr>
+          <p:cNvPr id="3" name="TextBox 2"/>
+          <p:cNvSpPr txBox="1"/>
+          <p:nvPr/>
+        </p:nvSpPr>
+        <p:spPr>
+          <a:xfrm>
+            <a:off x="457200" y="1280160"/>
+            <a:ext cx="8229600" cy="4937760"/>
+          </a:xfrm>
+          <a:prstGeom prst="rect">
+            <a:avLst/>
+          </a:prstGeom>
+          <a:noFill/>
+        </p:spPr>
+        <p:txBody>
+          <a:bodyPr wrap="square">
+            <a:spAutoFit/>
+          </a:bodyPr>
+          <a:lstStyle/>
+          <a:p>
+            <a:pPr>
+              <a:spcAft>
+                <a:spcPts val="600"/>
+              </a:spcAft>
+            </a:pPr>
+            <a:r>
+              <a:rPr sz="1500">
+                <a:solidFill>
+                  <a:srgbClr val="22282E"/>
+                </a:solidFill>
+              </a:rPr>
+              <a:t>•  RFC 4648, The Base16, Base32, and Base64 Data Encodings — &lt;https://www.rfc-editor.org/rfc/rfc4648&gt;</a:t>
+            </a:r>
+          </a:p>
+          <a:p>
+            <a:pPr>
+              <a:spcAft>
+                <a:spcPts val="600"/>
+              </a:spcAft>
+            </a:pPr>
+            <a:r>
+              <a:rPr sz="1500">
+                <a:solidFill>
+                  <a:srgbClr val="22282E"/>
+                </a:solidFill>
+              </a:rPr>
+              <a:t>•  RFC 3986, Uniform Resource Identifier (URI): Generic Syntax — &lt;https://www.rfc-editor.org/rfc/rfc3986&gt;</a:t>
+            </a:r>
+          </a:p>
+          <a:p>
+            <a:pPr>
+              <a:spcAft>
+                <a:spcPts val="600"/>
+              </a:spcAft>
+            </a:pPr>
+            <a:r>
+              <a:rPr sz="1500">
+                <a:solidFill>
+                  <a:srgbClr val="22282E"/>
+                </a:solidFill>
+              </a:rPr>
+              <a:t>•  The Unicode Standard (Unicode Consortium) — &lt;https://home.unicode.org/&gt;</a:t>
+            </a:r>
+          </a:p>
+          <a:p>
+            <a:pPr>
+              <a:spcAft>
+                <a:spcPts val="600"/>
+              </a:spcAft>
+            </a:pPr>
+            <a:r>
+              <a:rPr sz="1500">
+                <a:solidFill>
+                  <a:srgbClr val="22282E"/>
+                </a:solidFill>
+              </a:rPr>
+              <a:t>•  CyberChef (GCHQ) — &lt;https://gchq.github.io/CyberChef/&gt;</a:t>
+            </a:r>
+          </a:p>
+          <a:p>
+            <a:pPr>
+              <a:spcAft>
+                <a:spcPts val="600"/>
+              </a:spcAft>
+            </a:pPr>
+            <a:r>
+              <a:rPr sz="1500">
+                <a:solidFill>
+                  <a:srgbClr val="22282E"/>
+                </a:solidFill>
+              </a:rPr>
+              <a:t>•  Python, documentación de base64 — &lt;https://docs.python.org/3/library/base64.html&gt;</a:t>
+            </a:r>
+          </a:p>
+        </p:txBody>
+      </p:sp>
+    </p:spTree>
+  </p:cSld>
+  <p:clrMapOvr>
+    <a:masterClrMapping/>
+  </p:clrMapOvr>
+</p:sld>
+</file>
+
+<file path=ppt/slides/slide15.xml><?xml version="1.0" encoding="utf-8"?>
+<p:sld xmlns:a="http://schemas.openxmlformats.org/drawingml/2006/main" xmlns:p="http://schemas.openxmlformats.org/presentationml/2006/main" xmlns:r="http://schemas.openxmlformats.org/officeDocument/2006/relationships">
+  <p:cSld>
+    <p:spTree>
+      <p:nvGrpSpPr>
+        <p:cNvPr id="1" name=""/>
+        <p:cNvGrpSpPr/>
+        <p:nvPr/>
+      </p:nvGrpSpPr>
+      <p:grpSpPr/>
+      <p:sp>
+        <p:nvSpPr>
+          <p:cNvPr id="2" name="TextBox 1"/>
+          <p:cNvSpPr txBox="1"/>
+          <p:nvPr/>
+        </p:nvSpPr>
+        <p:spPr>
+          <a:xfrm>
+            <a:off x="457200" y="274320"/>
+            <a:ext cx="8229600" cy="640080"/>
+          </a:xfrm>
+          <a:prstGeom prst="rect">
+            <a:avLst/>
+          </a:prstGeom>
+          <a:noFill/>
+        </p:spPr>
+        <p:txBody>
+          <a:bodyPr wrap="square">
+            <a:spAutoFit/>
+          </a:bodyPr>
+          <a:lstStyle/>
+          <a:p>
+            <a:r>
+              <a:rPr sz="2200" b="1">
+                <a:solidFill>
+                  <a:srgbClr val="0B3D2E"/>
+                </a:solidFill>
+              </a:rPr>
+              <a:t>Diagrama 1</a:t>
+            </a:r>
+          </a:p>
+        </p:txBody>
+      </p:sp>
+      <p:pic>
+        <p:nvPicPr>
+          <p:cNvPr id="3" name="Picture 2" descr="4900514355d19f4b.png"/>
+          <p:cNvPicPr>
+            <a:picLocks noChangeAspect="1"/>
+          </p:cNvPicPr>
+          <p:nvPr/>
+        </p:nvPicPr>
+        <p:blipFill>
+          <a:blip r:embed="rId2"/>
+          <a:stretch>
+            <a:fillRect/>
+          </a:stretch>
+        </p:blipFill>
+        <p:spPr>
+          <a:xfrm>
+            <a:off x="457200" y="3310128"/>
+            <a:ext cx="8229600" cy="877824"/>
+          </a:xfrm>
+          <a:prstGeom prst="rect">
+            <a:avLst/>
+          </a:prstGeom>
+        </p:spPr>
+      </p:pic>
+    </p:spTree>
+  </p:cSld>
+  <p:clrMapOvr>
+    <a:masterClrMapping/>
+  </p:clrMapOvr>
+</p:sld>
+</file>
+
+<file path=ppt/slides/slide16.xml><?xml version="1.0" encoding="utf-8"?>
+<p:sld xmlns:a="http://schemas.openxmlformats.org/drawingml/2006/main" xmlns:p="http://schemas.openxmlformats.org/presentationml/2006/main" xmlns:r="http://schemas.openxmlformats.org/officeDocument/2006/relationships">
+  <p:cSld>
+    <p:spTree>
+      <p:nvGrpSpPr>
+        <p:cNvPr id="1" name=""/>
+        <p:cNvGrpSpPr/>
+        <p:nvPr/>
+      </p:nvGrpSpPr>
+      <p:grpSpPr/>
+      <p:sp>
+        <p:nvSpPr>
+          <p:cNvPr id="2" name="TextBox 1"/>
+          <p:cNvSpPr txBox="1"/>
+          <p:nvPr/>
+        </p:nvSpPr>
+        <p:spPr>
+          <a:xfrm>
+            <a:off x="457200" y="274320"/>
+            <a:ext cx="8229600" cy="640080"/>
+          </a:xfrm>
+          <a:prstGeom prst="rect">
+            <a:avLst/>
+          </a:prstGeom>
+          <a:noFill/>
+        </p:spPr>
+        <p:txBody>
+          <a:bodyPr wrap="square">
+            <a:spAutoFit/>
+          </a:bodyPr>
+          <a:lstStyle/>
+          <a:p>
+            <a:r>
+              <a:rPr sz="2200" b="1">
+                <a:solidFill>
+                  <a:srgbClr val="0B3D2E"/>
+                </a:solidFill>
+              </a:rPr>
+              <a:t>Diagrama 2</a:t>
+            </a:r>
+          </a:p>
+        </p:txBody>
+      </p:sp>
+      <p:pic>
+        <p:nvPicPr>
+          <p:cNvPr id="3" name="Picture 2" descr="b28de8b876918d9f.png"/>
+          <p:cNvPicPr>
+            <a:picLocks noChangeAspect="1"/>
+          </p:cNvPicPr>
+          <p:nvPr/>
+        </p:nvPicPr>
+        <p:blipFill>
+          <a:blip r:embed="rId2"/>
+          <a:stretch>
+            <a:fillRect/>
+          </a:stretch>
+        </p:blipFill>
+        <p:spPr>
+          <a:xfrm>
+            <a:off x="2834532" y="1097280"/>
+            <a:ext cx="3474936" cy="5303520"/>
+          </a:xfrm>
+          <a:prstGeom prst="rect">
+            <a:avLst/>
+          </a:prstGeom>
+        </p:spPr>
+      </p:pic>
     </p:spTree>
   </p:cSld>
   <p:clrMapOvr>
@@ -3653,7 +4105,7 @@
                   <a:srgbClr val="22282E"/>
                 </a:solidFill>
               </a:rPr>
-              <a:t>•  Entender cómo se representan y transforman los datos, base para leer volcados hex, decodificar payloads, ofuscar/desofuscar cargas y trabajar con protocolos. Al terminar distinguirás con claridad codificación de cifrado y hashing, un error conceptual muy extendido.</a:t>
+              <a:t>•  Entender cómo se representan y transforman los datos a bajo nivel, la base para leer volcados hexadecimales, decodificar payloads, ofuscar y desofuscar cargas y trabajar con protocolos. Al terminar…</a:t>
             </a:r>
           </a:p>
         </p:txBody>
@@ -3757,67 +4209,82 @@
                   <a:srgbClr val="22282E"/>
                 </a:solidFill>
               </a:rPr>
-              <a:t>•  Convertir entre binario, decimal, octal y hexadecimal.</a:t>
-            </a:r>
-          </a:p>
-          <a:p>
-            <a:pPr>
-              <a:spcAft>
-                <a:spcPts val="600"/>
-              </a:spcAft>
-            </a:pPr>
-            <a:r>
-              <a:rPr sz="1500">
-                <a:solidFill>
-                  <a:srgbClr val="22282E"/>
-                </a:solidFill>
-              </a:rPr>
-              <a:t>•  Explicar ASCII/Unicode y la diferencia bytes/texto.</a:t>
-            </a:r>
-          </a:p>
-          <a:p>
-            <a:pPr>
-              <a:spcAft>
-                <a:spcPts val="600"/>
-              </a:spcAft>
-            </a:pPr>
-            <a:r>
-              <a:rPr sz="1500">
-                <a:solidFill>
-                  <a:srgbClr val="22282E"/>
-                </a:solidFill>
-              </a:rPr>
-              <a:t>•  Codificar y decodificar en Base64, hex y URL/percent.</a:t>
-            </a:r>
-          </a:p>
-          <a:p>
-            <a:pPr>
-              <a:spcAft>
-                <a:spcPts val="600"/>
-              </a:spcAft>
-            </a:pPr>
-            <a:r>
-              <a:rPr sz="1500">
-                <a:solidFill>
-                  <a:srgbClr val="22282E"/>
-                </a:solidFill>
-              </a:rPr>
-              <a:t>•  Distinguir codificación, cifrado y hashing con criterio.</a:t>
-            </a:r>
-          </a:p>
-          <a:p>
-            <a:pPr>
-              <a:spcAft>
-                <a:spcPts val="600"/>
-              </a:spcAft>
-            </a:pPr>
-            <a:r>
-              <a:rPr sz="1500">
-                <a:solidFill>
-                  <a:srgbClr val="22282E"/>
-                </a:solidFill>
-              </a:rPr>
-              <a:t>•  Analizar payloads codificados en un contexto de seguridad.</a:t>
+              <a:t>•  Convertir entre binario, decimal, octal y hexadecimal con soltura.</a:t>
+            </a:r>
+          </a:p>
+          <a:p>
+            <a:pPr>
+              <a:spcAft>
+                <a:spcPts val="600"/>
+              </a:spcAft>
+            </a:pPr>
+            <a:r>
+              <a:rPr sz="1500">
+                <a:solidFill>
+                  <a:srgbClr val="22282E"/>
+                </a:solidFill>
+              </a:rPr>
+              <a:t>•  Explicar la relación entre ASCII, Unicode y UTF-8, y la diferencia entre bytes y texto.</a:t>
+            </a:r>
+          </a:p>
+          <a:p>
+            <a:pPr>
+              <a:spcAft>
+                <a:spcPts val="600"/>
+              </a:spcAft>
+            </a:pPr>
+            <a:r>
+              <a:rPr sz="1500">
+                <a:solidFill>
+                  <a:srgbClr val="22282E"/>
+                </a:solidFill>
+              </a:rPr>
+              <a:t>•  Codificar y decodificar en Base64, hexadecimal y URL/percent encoding.</a:t>
+            </a:r>
+          </a:p>
+          <a:p>
+            <a:pPr>
+              <a:spcAft>
+                <a:spcPts val="600"/>
+              </a:spcAft>
+            </a:pPr>
+            <a:r>
+              <a:rPr sz="1500">
+                <a:solidFill>
+                  <a:srgbClr val="22282E"/>
+                </a:solidFill>
+              </a:rPr>
+              <a:t>•  Distinguir con criterio codificación, cifrado y hashing.</a:t>
+            </a:r>
+          </a:p>
+          <a:p>
+            <a:pPr>
+              <a:spcAft>
+                <a:spcPts val="600"/>
+              </a:spcAft>
+            </a:pPr>
+            <a:r>
+              <a:rPr sz="1500">
+                <a:solidFill>
+                  <a:srgbClr val="22282E"/>
+                </a:solidFill>
+              </a:rPr>
+              <a:t>•  Analizar payloads codificados y en capas dentro de un contexto de seguridad.</a:t>
+            </a:r>
+          </a:p>
+          <a:p>
+            <a:pPr>
+              <a:spcAft>
+                <a:spcPts val="600"/>
+              </a:spcAft>
+            </a:pPr>
+            <a:r>
+              <a:rPr sz="1500">
+                <a:solidFill>
+                  <a:srgbClr val="22282E"/>
+                </a:solidFill>
+              </a:rPr>
+              <a:t>•  Detectar heurísticamente el tipo de codificación de una cadena desconocida.</a:t>
             </a:r>
           </a:p>
         </p:txBody>
@@ -3936,7 +4403,7 @@
                   <a:srgbClr val="22282E"/>
                 </a:solidFill>
               </a:rPr>
-              <a:t>•  3 — ASCII y Unicode</a:t>
+              <a:t>•  3 — ASCII, Unicode y UTF-8</a:t>
             </a:r>
           </a:p>
           <a:p>
@@ -4047,7 +4514,7 @@
                   <a:srgbClr val="0B3D2E"/>
                 </a:solidFill>
               </a:rPr>
-              <a:t>📖 Definiciones y características</a:t>
+              <a:t>🧠 Explicación en profundidad</a:t>
             </a:r>
           </a:p>
         </p:txBody>
@@ -4085,82 +4552,97 @@
                   <a:srgbClr val="22282E"/>
                 </a:solidFill>
               </a:rPr>
-              <a:t>•  Hexadecimal: base 16 (0-9, A-F). Clave: cada dígito = 4 bits (nibble); 1 byte = 2 hex. Prefijo 0x.</a:t>
-            </a:r>
-          </a:p>
-          <a:p>
-            <a:pPr>
-              <a:spcAft>
-                <a:spcPts val="600"/>
-              </a:spcAft>
-            </a:pPr>
-            <a:r>
-              <a:rPr sz="1500">
-                <a:solidFill>
-                  <a:srgbClr val="22282E"/>
-                </a:solidFill>
-              </a:rPr>
-              <a:t>•  ASCII/Unicode: mapeos de caracteres a números. Clave: UTF-8 codifica Unicode en bytes; distinguir carácter de byte es esencial.</a:t>
-            </a:r>
-          </a:p>
-          <a:p>
-            <a:pPr>
-              <a:spcAft>
-                <a:spcPts val="600"/>
-              </a:spcAft>
-            </a:pPr>
-            <a:r>
-              <a:rPr sz="1500">
-                <a:solidFill>
-                  <a:srgbClr val="22282E"/>
-                </a:solidFill>
-              </a:rPr>
-              <a:t>•  Base64: representa binario con 64 caracteres imprimibles. Clave: no cifra; es reversible por cualquiera. Aumenta el tamaño ~33%.</a:t>
-            </a:r>
-          </a:p>
-          <a:p>
-            <a:pPr>
-              <a:spcAft>
-                <a:spcPts val="600"/>
-              </a:spcAft>
-            </a:pPr>
-            <a:r>
-              <a:rPr sz="1500">
-                <a:solidFill>
-                  <a:srgbClr val="22282E"/>
-                </a:solidFill>
-              </a:rPr>
-              <a:t>•  URL/percent encoding: sustituye caracteres reservados por %XX. Clave: %20 = espacio; usado para evadir filtros y en inyecciones web.</a:t>
-            </a:r>
-          </a:p>
-          <a:p>
-            <a:pPr>
-              <a:spcAft>
-                <a:spcPts val="600"/>
-              </a:spcAft>
-            </a:pPr>
-            <a:r>
-              <a:rPr sz="1500">
-                <a:solidFill>
-                  <a:srgbClr val="22282E"/>
-                </a:solidFill>
-              </a:rPr>
-              <a:t>•  Codificación: transformación reversible sin secreto. Clave: cualquiera la revierte; no aporta confidencialidad.</a:t>
-            </a:r>
-          </a:p>
-          <a:p>
-            <a:pPr>
-              <a:spcAft>
-                <a:spcPts val="600"/>
-              </a:spcAft>
-            </a:pPr>
-            <a:r>
-              <a:rPr sz="1500">
-                <a:solidFill>
-                  <a:srgbClr val="22282E"/>
-                </a:solidFill>
-              </a:rPr>
-              <a:t>•  Hashing: función unidireccional a un valor fijo. Clave: no reversible; verifica integridad, no oculta datos recuperables.</a:t>
+              <a:t>•  Un mismo número puede escribirse en distintas bases sin cambiar su valor: 255 en decimal es 11111111 en binario y FF en hexadecimal. El binario es como piensa la máquina (bits), pero es incómodo de…</a:t>
+            </a:r>
+          </a:p>
+          <a:p>
+            <a:pPr>
+              <a:spcAft>
+                <a:spcPts val="600"/>
+              </a:spcAft>
+            </a:pPr>
+            <a:r>
+              <a:rPr sz="1500">
+                <a:solidFill>
+                  <a:srgbClr val="22282E"/>
+                </a:solidFill>
+              </a:rPr>
+              <a:t>•  Decimal — Binario (nibble)</a:t>
+            </a:r>
+          </a:p>
+          <a:p>
+            <a:pPr>
+              <a:spcAft>
+                <a:spcPts val="600"/>
+              </a:spcAft>
+            </a:pPr>
+            <a:r>
+              <a:rPr sz="1500">
+                <a:solidFill>
+                  <a:srgbClr val="22282E"/>
+                </a:solidFill>
+              </a:rPr>
+              <a:t>•  0 — 0000</a:t>
+            </a:r>
+          </a:p>
+          <a:p>
+            <a:pPr>
+              <a:spcAft>
+                <a:spcPts val="600"/>
+              </a:spcAft>
+            </a:pPr>
+            <a:r>
+              <a:rPr sz="1500">
+                <a:solidFill>
+                  <a:srgbClr val="22282E"/>
+                </a:solidFill>
+              </a:rPr>
+              <a:t>•  5 — 0101</a:t>
+            </a:r>
+          </a:p>
+          <a:p>
+            <a:pPr>
+              <a:spcAft>
+                <a:spcPts val="600"/>
+              </a:spcAft>
+            </a:pPr>
+            <a:r>
+              <a:rPr sz="1500">
+                <a:solidFill>
+                  <a:srgbClr val="22282E"/>
+                </a:solidFill>
+              </a:rPr>
+              <a:t>•  10 — 1010</a:t>
+            </a:r>
+          </a:p>
+          <a:p>
+            <a:pPr>
+              <a:spcAft>
+                <a:spcPts val="600"/>
+              </a:spcAft>
+            </a:pPr>
+            <a:r>
+              <a:rPr sz="1500">
+                <a:solidFill>
+                  <a:srgbClr val="22282E"/>
+                </a:solidFill>
+              </a:rPr>
+              <a:t>•  15 — 1111</a:t>
+            </a:r>
+          </a:p>
+          <a:p>
+            <a:pPr>
+              <a:spcAft>
+                <a:spcPts val="600"/>
+              </a:spcAft>
+            </a:pPr>
+            <a:r>
+              <a:rPr sz="1500">
+                <a:solidFill>
+                  <a:srgbClr val="22282E"/>
+                </a:solidFill>
+              </a:rPr>
+              <a:t>•  255 — 1111 1111</a:t>
             </a:r>
           </a:p>
         </p:txBody>
@@ -4211,7 +4693,7 @@
                   <a:srgbClr val="0B3D2E"/>
                 </a:solidFill>
               </a:rPr>
-              <a:t>🧰 Herramientas y preparación</a:t>
+              <a:t>📖 Definiciones y características</a:t>
             </a:r>
           </a:p>
         </p:txBody>
@@ -4249,7 +4731,97 @@
                   <a:srgbClr val="22282E"/>
                 </a:solidFill>
               </a:rPr>
-              <a:t>•  Herramientas: xxd/hexdump, base64, python3 (base64, binascii, urllib.parse), y CyberChef (&lt;https://gchq.github.io/CyberChef/&gt;) para experimentar con cadenas de operaciones. Todo disponible en Kali o en el navegador.</a:t>
+              <a:t>•  Hexadecimal: sistema en base 16 (0-9, A-F). Cada dígito representa exactamente 4 bits (un nibble), por lo que un byte son dos dígitos hex. Se prefija con 0x y domina en seguridad por su…</a:t>
+            </a:r>
+          </a:p>
+          <a:p>
+            <a:pPr>
+              <a:spcAft>
+                <a:spcPts val="600"/>
+              </a:spcAft>
+            </a:pPr>
+            <a:r>
+              <a:rPr sz="1500">
+                <a:solidFill>
+                  <a:srgbClr val="22282E"/>
+                </a:solidFill>
+              </a:rPr>
+              <a:t>•  Nibble: grupo de 4 bits, la mitad de un byte, que se corresponde con un único dígito hexadecimal. Es la unidad que hace del hex una notación tan cómoda.</a:t>
+            </a:r>
+          </a:p>
+          <a:p>
+            <a:pPr>
+              <a:spcAft>
+                <a:spcPts val="600"/>
+              </a:spcAft>
+            </a:pPr>
+            <a:r>
+              <a:rPr sz="1500">
+                <a:solidFill>
+                  <a:srgbClr val="22282E"/>
+                </a:solidFill>
+              </a:rPr>
+              <a:t>•  ASCII: mapeo original de caracteres a números de 7 bits (la A es 65). Cubre el inglés y es la base sobre la que se construyó Unicode; en UTF-8 los caracteres ASCII ocupan un solo byte idéntico.</a:t>
+            </a:r>
+          </a:p>
+          <a:p>
+            <a:pPr>
+              <a:spcAft>
+                <a:spcPts val="600"/>
+              </a:spcAft>
+            </a:pPr>
+            <a:r>
+              <a:rPr sz="1500">
+                <a:solidFill>
+                  <a:srgbClr val="22282E"/>
+                </a:solidFill>
+              </a:rPr>
+              <a:t>•  Unicode y UTF-8: Unicode es el catálogo abstracto de code points de casi todos los idiomas; UTF-8 es la codificación que los traduce a secuencias de 1 a 4 bytes. Distinguir el carácter (abstracto)…</a:t>
+            </a:r>
+          </a:p>
+          <a:p>
+            <a:pPr>
+              <a:spcAft>
+                <a:spcPts val="600"/>
+              </a:spcAft>
+            </a:pPr>
+            <a:r>
+              <a:rPr sz="1500">
+                <a:solidFill>
+                  <a:srgbClr val="22282E"/>
+                </a:solidFill>
+              </a:rPr>
+              <a:t>•  Base64: codificación que representa cada 3 bytes como 4 caracteres imprimibles de un alfabeto de 64 símbolos, con = de relleno. No cifra: es reversible por cualquiera y aumenta el tamaño en torno a…</a:t>
+            </a:r>
+          </a:p>
+          <a:p>
+            <a:pPr>
+              <a:spcAft>
+                <a:spcPts val="600"/>
+              </a:spcAft>
+            </a:pPr>
+            <a:r>
+              <a:rPr sz="1500">
+                <a:solidFill>
+                  <a:srgbClr val="22282E"/>
+                </a:solidFill>
+              </a:rPr>
+              <a:t>•  URL/percent encoding: sustitución de caracteres reservados por %XX (su valor hex). %20 es espacio; se usa legítimamente en URLs y también para evadir filtros y WAFs en inyecciones web.</a:t>
+            </a:r>
+          </a:p>
+          <a:p>
+            <a:pPr>
+              <a:spcAft>
+                <a:spcPts val="600"/>
+              </a:spcAft>
+            </a:pPr>
+            <a:r>
+              <a:rPr sz="1500">
+                <a:solidFill>
+                  <a:srgbClr val="22282E"/>
+                </a:solidFill>
+              </a:rPr>
+              <a:t>•  Codificación: transformación reversible sin secreto, para transporte o compatibilidad. No aporta confidencialidad porque cualquiera la revierte; confundirla con cifrado es un error de seguridad…</a:t>
             </a:r>
           </a:p>
         </p:txBody>
@@ -4300,7 +4872,7 @@
                   <a:srgbClr val="0B3D2E"/>
                 </a:solidFill>
               </a:rPr>
-              <a:t>🧪 Laboratorio guiado</a:t>
+              <a:t>📔 Glosario</a:t>
             </a:r>
           </a:p>
         </p:txBody>
@@ -4338,97 +4910,97 @@
                   <a:srgbClr val="22282E"/>
                 </a:solidFill>
               </a:rPr>
-              <a:t>•  Conversión de bases en Python:</a:t>
-            </a:r>
-          </a:p>
-          <a:p>
-            <a:pPr>
-              <a:spcAft>
-                <a:spcPts val="600"/>
-              </a:spcAft>
-            </a:pPr>
-            <a:r>
-              <a:rPr sz="1500">
-                <a:solidFill>
-                  <a:srgbClr val="22282E"/>
-                </a:solidFill>
-              </a:rPr>
-              <a:t>•  n = 0xFF</a:t>
-            </a:r>
-          </a:p>
-          <a:p>
-            <a:pPr>
-              <a:spcAft>
-                <a:spcPts val="600"/>
-              </a:spcAft>
-            </a:pPr>
-            <a:r>
-              <a:rPr sz="1500">
-                <a:solidFill>
-                  <a:srgbClr val="22282E"/>
-                </a:solidFill>
-              </a:rPr>
-              <a:t>•  print(bin(n), oct(n), n)      # binario, octal, decimal</a:t>
-            </a:r>
-          </a:p>
-          <a:p>
-            <a:pPr>
-              <a:spcAft>
-                <a:spcPts val="600"/>
-              </a:spcAft>
-            </a:pPr>
-            <a:r>
-              <a:rPr sz="1500">
-                <a:solidFill>
-                  <a:srgbClr val="22282E"/>
-                </a:solidFill>
-              </a:rPr>
-              <a:t>•  print(int("11111111", 2), hex(255))</a:t>
-            </a:r>
-          </a:p>
-          <a:p>
-            <a:pPr>
-              <a:spcAft>
-                <a:spcPts val="600"/>
-              </a:spcAft>
-            </a:pPr>
-            <a:r>
-              <a:rPr sz="1500">
-                <a:solidFill>
-                  <a:srgbClr val="22282E"/>
-                </a:solidFill>
-              </a:rPr>
-              <a:t>•  Hex dump de un archivo:</a:t>
-            </a:r>
-          </a:p>
-          <a:p>
-            <a:pPr>
-              <a:spcAft>
-                <a:spcPts val="600"/>
-              </a:spcAft>
-            </a:pPr>
-            <a:r>
-              <a:rPr sz="1500">
-                <a:solidFill>
-                  <a:srgbClr val="22282E"/>
-                </a:solidFill>
-              </a:rPr>
-              <a:t>•  echo -n "admin:1234" | xxd</a:t>
-            </a:r>
-          </a:p>
-          <a:p>
-            <a:pPr>
-              <a:spcAft>
-                <a:spcPts val="600"/>
-              </a:spcAft>
-            </a:pPr>
-            <a:r>
-              <a:rPr sz="1500">
-                <a:solidFill>
-                  <a:srgbClr val="22282E"/>
-                </a:solidFill>
-              </a:rPr>
-              <a:t>•  Relaciona cada byte con su carácter ASCII.</a:t>
+              <a:t>•  Término — Definición concisa</a:t>
+            </a:r>
+          </a:p>
+          <a:p>
+            <a:pPr>
+              <a:spcAft>
+                <a:spcPts val="600"/>
+              </a:spcAft>
+            </a:pPr>
+            <a:r>
+              <a:rPr sz="1500">
+                <a:solidFill>
+                  <a:srgbClr val="22282E"/>
+                </a:solidFill>
+              </a:rPr>
+              <a:t>•  Bit — Dígito binario, 0 o 1</a:t>
+            </a:r>
+          </a:p>
+          <a:p>
+            <a:pPr>
+              <a:spcAft>
+                <a:spcPts val="600"/>
+              </a:spcAft>
+            </a:pPr>
+            <a:r>
+              <a:rPr sz="1500">
+                <a:solidFill>
+                  <a:srgbClr val="22282E"/>
+                </a:solidFill>
+              </a:rPr>
+              <a:t>•  Byte — Grupo de 8 bits</a:t>
+            </a:r>
+          </a:p>
+          <a:p>
+            <a:pPr>
+              <a:spcAft>
+                <a:spcPts val="600"/>
+              </a:spcAft>
+            </a:pPr>
+            <a:r>
+              <a:rPr sz="1500">
+                <a:solidFill>
+                  <a:srgbClr val="22282E"/>
+                </a:solidFill>
+              </a:rPr>
+              <a:t>•  Nibble — Grupo de 4 bits = un dígito hex</a:t>
+            </a:r>
+          </a:p>
+          <a:p>
+            <a:pPr>
+              <a:spcAft>
+                <a:spcPts val="600"/>
+              </a:spcAft>
+            </a:pPr>
+            <a:r>
+              <a:rPr sz="1500">
+                <a:solidFill>
+                  <a:srgbClr val="22282E"/>
+                </a:solidFill>
+              </a:rPr>
+              <a:t>•  Base — Sistema de numeración (2, 8, 10, 16)</a:t>
+            </a:r>
+          </a:p>
+          <a:p>
+            <a:pPr>
+              <a:spcAft>
+                <a:spcPts val="600"/>
+              </a:spcAft>
+            </a:pPr>
+            <a:r>
+              <a:rPr sz="1500">
+                <a:solidFill>
+                  <a:srgbClr val="22282E"/>
+                </a:solidFill>
+              </a:rPr>
+              <a:t>•  Hexadecimal — Base 16 (0-9, A-F), prefijo 0x</a:t>
+            </a:r>
+          </a:p>
+          <a:p>
+            <a:pPr>
+              <a:spcAft>
+                <a:spcPts val="600"/>
+              </a:spcAft>
+            </a:pPr>
+            <a:r>
+              <a:rPr sz="1500">
+                <a:solidFill>
+                  <a:srgbClr val="22282E"/>
+                </a:solidFill>
+              </a:rPr>
+              <a:t>•  ASCII — Mapeo de caracteres a 7 bits</a:t>
             </a:r>
           </a:p>
         </p:txBody>
@@ -4479,7 +5051,7 @@
                   <a:srgbClr val="0B3D2E"/>
                 </a:solidFill>
               </a:rPr>
-              <a:t>✍️ Ejercicios</a:t>
+              <a:t>🧰 Herramientas y preparación</a:t>
             </a:r>
           </a:p>
         </p:txBody>
@@ -4517,82 +5089,7 @@
                   <a:srgbClr val="22282E"/>
                 </a:solidFill>
               </a:rPr>
-              <a:t>•  Convierte a mano 192 y 168 a binario y a hex; verifica con Python.</a:t>
-            </a:r>
-          </a:p>
-          <a:p>
-            <a:pPr>
-              <a:spcAft>
-                <a:spcPts val="600"/>
-              </a:spcAft>
-            </a:pPr>
-            <a:r>
-              <a:rPr sz="1500">
-                <a:solidFill>
-                  <a:srgbClr val="22282E"/>
-                </a:solidFill>
-              </a:rPr>
-              <a:t>•  Decodifica una cabecera HTTP Authorization: Basic ... (Base64) y explica el riesgo.</a:t>
-            </a:r>
-          </a:p>
-          <a:p>
-            <a:pPr>
-              <a:spcAft>
-                <a:spcPts val="600"/>
-              </a:spcAft>
-            </a:pPr>
-            <a:r>
-              <a:rPr sz="1500">
-                <a:solidFill>
-                  <a:srgbClr val="22282E"/>
-                </a:solidFill>
-              </a:rPr>
-              <a:t>•  Identifica si 5f4dcc3b5aa765d61d8327deb882cf99 es un hash o un encoding y de qué tipo.</a:t>
-            </a:r>
-          </a:p>
-          <a:p>
-            <a:pPr>
-              <a:spcAft>
-                <a:spcPts val="600"/>
-              </a:spcAft>
-            </a:pPr>
-            <a:r>
-              <a:rPr sz="1500">
-                <a:solidFill>
-                  <a:srgbClr val="22282E"/>
-                </a:solidFill>
-              </a:rPr>
-              <a:t>•  Toma un payload XSS y aplícale URL encoding y HTML entity encoding; explica para qué sirve cada uno.</a:t>
-            </a:r>
-          </a:p>
-          <a:p>
-            <a:pPr>
-              <a:spcAft>
-                <a:spcPts val="600"/>
-              </a:spcAft>
-            </a:pPr>
-            <a:r>
-              <a:rPr sz="1500">
-                <a:solidFill>
-                  <a:srgbClr val="22282E"/>
-                </a:solidFill>
-              </a:rPr>
-              <a:t>•  Escribe una función que detecte automáticamente si una cadena parece Base64, hex o URL-encoded.</a:t>
-            </a:r>
-          </a:p>
-          <a:p>
-            <a:pPr>
-              <a:spcAft>
-                <a:spcPts val="600"/>
-              </a:spcAft>
-            </a:pPr>
-            <a:r>
-              <a:rPr sz="1500">
-                <a:solidFill>
-                  <a:srgbClr val="22282E"/>
-                </a:solidFill>
-              </a:rPr>
-              <a:t>•  Decodifica una cadena con doble Base64 y documenta cada capa.</a:t>
+              <a:t>•  Trabajarás con xxd y hexdump para volcados hex, con base64 para codificar y decodificar, con Python (base64, binascii, urllib.parse) para automatizar, y con CyberChef…</a:t>
             </a:r>
           </a:p>
         </p:txBody>
@@ -4643,7 +5140,7 @@
                   <a:srgbClr val="0B3D2E"/>
                 </a:solidFill>
               </a:rPr>
-              <a:t>📝 Reto verificable</a:t>
+              <a:t>🧪 Laboratorio guiado</a:t>
             </a:r>
           </a:p>
         </p:txBody>
@@ -4681,22 +5178,82 @@
                   <a:srgbClr val="22282E"/>
                 </a:solidFill>
               </a:rPr>
-              <a:t>•  Escribe decoder.py, una utilidad que reciba una cadena e intente detectar y decodificar automáticamente su capa externa (Base64, hex o percent-encoding), aplicándolo de forma recursiva hasta obtener texto legible o datos binarios. Debe informar de cada capa detectada y negarse a "decodificar" un hash, explicando por qué.</a:t>
-            </a:r>
-          </a:p>
-          <a:p>
-            <a:pPr>
-              <a:spcAft>
-                <a:spcPts val="600"/>
-              </a:spcAft>
-            </a:pPr>
-            <a:r>
-              <a:rPr sz="1500">
-                <a:solidFill>
-                  <a:srgbClr val="22282E"/>
-                </a:solidFill>
-              </a:rPr>
-              <a:t>•  Criterio de aceptación: sobre una cadena con dos capas (p. ej. URL-encode de un Base64) la herramienta revela el texto original indicando ambas capas; ante un SHA-256 responde que es un hash irreversible en vez de intentar decodificarlo. Reproducible con ejemplos verificables en CyberChef.</a:t>
+              <a:t>•  Conversión de bases en Python:</a:t>
+            </a:r>
+          </a:p>
+          <a:p>
+            <a:pPr>
+              <a:spcAft>
+                <a:spcPts val="600"/>
+              </a:spcAft>
+            </a:pPr>
+            <a:r>
+              <a:rPr sz="1500">
+                <a:solidFill>
+                  <a:srgbClr val="22282E"/>
+                </a:solidFill>
+              </a:rPr>
+              <a:t>•  Hex dump de una cadena, relacionando cada byte con su carácter ASCII:</a:t>
+            </a:r>
+          </a:p>
+          <a:p>
+            <a:pPr>
+              <a:spcAft>
+                <a:spcPts val="600"/>
+              </a:spcAft>
+            </a:pPr>
+            <a:r>
+              <a:rPr sz="1500">
+                <a:solidFill>
+                  <a:srgbClr val="22282E"/>
+                </a:solidFill>
+              </a:rPr>
+              <a:t>•  Base64 ida y vuelta, comprobando que es trivialmente reversible:</a:t>
+            </a:r>
+          </a:p>
+          <a:p>
+            <a:pPr>
+              <a:spcAft>
+                <a:spcPts val="600"/>
+              </a:spcAft>
+            </a:pPr>
+            <a:r>
+              <a:rPr sz="1500">
+                <a:solidFill>
+                  <a:srgbClr val="22282E"/>
+                </a:solidFill>
+              </a:rPr>
+              <a:t>•  URL encoding en Python:</a:t>
+            </a:r>
+          </a:p>
+          <a:p>
+            <a:pPr>
+              <a:spcAft>
+                <a:spcPts val="600"/>
+              </a:spcAft>
+            </a:pPr>
+            <a:r>
+              <a:rPr sz="1500">
+                <a:solidFill>
+                  <a:srgbClr val="22282E"/>
+                </a:solidFill>
+              </a:rPr>
+              <a:t>•  Cadena de encodings. En CyberChef, toma un texto, aplícale Base64 y después URL-encode; luego construye la receta inversa para revertirlo. Así ves cómo se pelan los payloads en capas.</a:t>
+            </a:r>
+          </a:p>
+          <a:p>
+            <a:pPr>
+              <a:spcAft>
+                <a:spcPts val="600"/>
+              </a:spcAft>
+            </a:pPr>
+            <a:r>
+              <a:rPr sz="1500">
+                <a:solidFill>
+                  <a:srgbClr val="22282E"/>
+                </a:solidFill>
+              </a:rPr>
+              <a:t>•  Diferenciar hashing. Calcula el SHA-256 de admin y comprueba que no puedes recuperar admin a partir de él, a diferencia de lo que ocurre con Base64:</a:t>
             </a:r>
           </a:p>
         </p:txBody>
